--- a/projects/undercover-mob-boss/docs/UMB-Executive-Summary.pptx
+++ b/projects/undercover-mob-boss/docs/UMB-Executive-Summary.pptx
@@ -1577,7 +1577,7 @@
                 <a:ea typeface="Georgia" pitchFamily="34" charset="-122"/>
                 <a:cs typeface="Georgia" pitchFamily="34" charset="-120"/>
               </a:rPr>
-              <a:t>Concept to Production in 8 Days</a:t>
+              <a:t>Concept to Production in 8 Nights</a:t>
             </a:r>
             <a:endParaRPr lang="en-US" sz="2200" dirty="0"/>
           </a:p>
@@ -2913,7 +2913,7 @@
                 <a:ea typeface="Georgia" pitchFamily="34" charset="-122"/>
                 <a:cs typeface="Georgia" pitchFamily="34" charset="-120"/>
               </a:rPr>
-              <a:t>Day 1</a:t>
+              <a:t>Night 1</a:t>
             </a:r>
             <a:endParaRPr lang="en-US" sz="1300" dirty="0"/>
           </a:p>
@@ -3011,7 +3011,7 @@
                 <a:ea typeface="Georgia" pitchFamily="34" charset="-122"/>
                 <a:cs typeface="Georgia" pitchFamily="34" charset="-120"/>
               </a:rPr>
-              <a:t>Day 2</a:t>
+              <a:t>Night 2</a:t>
             </a:r>
             <a:endParaRPr lang="en-US" sz="1300" dirty="0"/>
           </a:p>
@@ -3109,7 +3109,7 @@
                 <a:ea typeface="Georgia" pitchFamily="34" charset="-122"/>
                 <a:cs typeface="Georgia" pitchFamily="34" charset="-120"/>
               </a:rPr>
-              <a:t>Day 3</a:t>
+              <a:t>Night 3</a:t>
             </a:r>
             <a:endParaRPr lang="en-US" sz="1300" dirty="0"/>
           </a:p>
@@ -3207,7 +3207,7 @@
                 <a:ea typeface="Georgia" pitchFamily="34" charset="-122"/>
                 <a:cs typeface="Georgia" pitchFamily="34" charset="-120"/>
               </a:rPr>
-              <a:t>Days 4–5</a:t>
+              <a:t>Nights 4–5</a:t>
             </a:r>
             <a:endParaRPr lang="en-US" sz="1300" dirty="0"/>
           </a:p>
@@ -3305,7 +3305,7 @@
                 <a:ea typeface="Georgia" pitchFamily="34" charset="-122"/>
                 <a:cs typeface="Georgia" pitchFamily="34" charset="-120"/>
               </a:rPr>
-              <a:t>Day 6</a:t>
+              <a:t>Night 6</a:t>
             </a:r>
             <a:endParaRPr lang="en-US" sz="1300" dirty="0"/>
           </a:p>
@@ -3403,7 +3403,7 @@
                 <a:ea typeface="Georgia" pitchFamily="34" charset="-122"/>
                 <a:cs typeface="Georgia" pitchFamily="34" charset="-120"/>
               </a:rPr>
-              <a:t>Days 7–8</a:t>
+              <a:t>Nights 7–8</a:t>
             </a:r>
             <a:endParaRPr lang="en-US" sz="1300" dirty="0"/>
           </a:p>

--- a/projects/undercover-mob-boss/docs/UMB-Executive-Summary.pptx
+++ b/projects/undercover-mob-boss/docs/UMB-Executive-Summary.pptx
@@ -4163,7 +4163,7 @@
                 <a:ea typeface="Calibri" pitchFamily="34" charset="-122"/>
                 <a:cs typeface="Calibri" pitchFamily="34" charset="-120"/>
               </a:rPr>
-              <a:t>Architectural Defects</a:t>
+              <a:t>Functional Defects</a:t>
             </a:r>
             <a:endParaRPr lang="en-US" sz="1400" dirty="0"/>
           </a:p>
@@ -4202,7 +4202,7 @@
                 <a:ea typeface="Calibri" pitchFamily="34" charset="-122"/>
                 <a:cs typeface="Calibri" pitchFamily="34" charset="-120"/>
               </a:rPr>
-              <a:t>Engine correct from day one</a:t>
+              <a:t>Engine correct from night one</a:t>
             </a:r>
             <a:endParaRPr lang="en-US" sz="1100" dirty="0"/>
           </a:p>
@@ -6261,7 +6261,7 @@
                 <a:ea typeface="Georgia" pitchFamily="34" charset="-122"/>
                 <a:cs typeface="Georgia" pitchFamily="34" charset="-120"/>
               </a:rPr>
-              <a:t>Zero architectural defects. Zero game logic defects. The spec was right — so the code was right.</a:t>
+              <a:t>Zero functional defects. The spec was right — so the code was right.</a:t>
             </a:r>
             <a:endParaRPr lang="en-US" sz="1400" dirty="0"/>
           </a:p>
